--- a/Unit-1-Ch-3/Ch3-South-Southeast-Asia.pptx
+++ b/Unit-1-Ch-3/Ch3-South-Southeast-Asia.pptx
@@ -9077,7 +9077,7 @@
                 <a:ea typeface="Calibri" pitchFamily="34" charset="-122"/>
                 <a:cs typeface="Calibri" pitchFamily="34" charset="-120"/>
               </a:rPr>
-              <a:t>Port city-state on the Malay Peninsula (~1400); ruler converted to Islam ~1414, making it SE Asia's first major Islamic polity.</a:t>
+              <a:t>Port city-state on the Malay Peninsula (~1400); ruler converted to Islam ~1414, one of SE Asia's earliest major Islamic polities (Samudra Pasai, c. 1267, predates it slightly).</a:t>
             </a:r>
             <a:endParaRPr lang="en-US" sz="950" dirty="0"/>
           </a:p>
